--- a/FSAD-PPT_Project_1 .pptx
+++ b/FSAD-PPT_Project_1 .pptx
@@ -328,7 +328,7 @@
             <a:fld id="{1D8BD707-D9CF-40AE-B4C6-C98DA3205C09}" type="datetimeFigureOut">
               <a:rPr lang="en-US" smtClean="0"/>
               <a:pPr/>
-              <a:t>3/23/2026</a:t>
+              <a:t>3/24/2026</a:t>
             </a:fld>
             <a:endParaRPr lang="en-US"/>
           </a:p>
@@ -493,7 +493,7 @@
             <a:fld id="{1D8BD707-D9CF-40AE-B4C6-C98DA3205C09}" type="datetimeFigureOut">
               <a:rPr lang="en-US" smtClean="0"/>
               <a:pPr/>
-              <a:t>3/23/2026</a:t>
+              <a:t>3/24/2026</a:t>
             </a:fld>
             <a:endParaRPr lang="en-US"/>
           </a:p>
@@ -668,7 +668,7 @@
             <a:fld id="{1D8BD707-D9CF-40AE-B4C6-C98DA3205C09}" type="datetimeFigureOut">
               <a:rPr lang="en-US" smtClean="0"/>
               <a:pPr/>
-              <a:t>3/23/2026</a:t>
+              <a:t>3/24/2026</a:t>
             </a:fld>
             <a:endParaRPr lang="en-US"/>
           </a:p>
@@ -833,7 +833,7 @@
             <a:fld id="{1D8BD707-D9CF-40AE-B4C6-C98DA3205C09}" type="datetimeFigureOut">
               <a:rPr lang="en-US" smtClean="0"/>
               <a:pPr/>
-              <a:t>3/23/2026</a:t>
+              <a:t>3/24/2026</a:t>
             </a:fld>
             <a:endParaRPr lang="en-US"/>
           </a:p>
@@ -1075,7 +1075,7 @@
             <a:fld id="{1D8BD707-D9CF-40AE-B4C6-C98DA3205C09}" type="datetimeFigureOut">
               <a:rPr lang="en-US" smtClean="0"/>
               <a:pPr/>
-              <a:t>3/23/2026</a:t>
+              <a:t>3/24/2026</a:t>
             </a:fld>
             <a:endParaRPr lang="en-US"/>
           </a:p>
@@ -1357,7 +1357,7 @@
             <a:fld id="{1D8BD707-D9CF-40AE-B4C6-C98DA3205C09}" type="datetimeFigureOut">
               <a:rPr lang="en-US" smtClean="0"/>
               <a:pPr/>
-              <a:t>3/23/2026</a:t>
+              <a:t>3/24/2026</a:t>
             </a:fld>
             <a:endParaRPr lang="en-US"/>
           </a:p>
@@ -1773,7 +1773,7 @@
             <a:fld id="{1D8BD707-D9CF-40AE-B4C6-C98DA3205C09}" type="datetimeFigureOut">
               <a:rPr lang="en-US" smtClean="0"/>
               <a:pPr/>
-              <a:t>3/23/2026</a:t>
+              <a:t>3/24/2026</a:t>
             </a:fld>
             <a:endParaRPr lang="en-US"/>
           </a:p>
@@ -1887,7 +1887,7 @@
             <a:fld id="{1D8BD707-D9CF-40AE-B4C6-C98DA3205C09}" type="datetimeFigureOut">
               <a:rPr lang="en-US" smtClean="0"/>
               <a:pPr/>
-              <a:t>3/23/2026</a:t>
+              <a:t>3/24/2026</a:t>
             </a:fld>
             <a:endParaRPr lang="en-US"/>
           </a:p>
@@ -1979,7 +1979,7 @@
             <a:fld id="{1D8BD707-D9CF-40AE-B4C6-C98DA3205C09}" type="datetimeFigureOut">
               <a:rPr lang="en-US" smtClean="0"/>
               <a:pPr/>
-              <a:t>3/23/2026</a:t>
+              <a:t>3/24/2026</a:t>
             </a:fld>
             <a:endParaRPr lang="en-US"/>
           </a:p>
@@ -2251,7 +2251,7 @@
             <a:fld id="{1D8BD707-D9CF-40AE-B4C6-C98DA3205C09}" type="datetimeFigureOut">
               <a:rPr lang="en-US" smtClean="0"/>
               <a:pPr/>
-              <a:t>3/23/2026</a:t>
+              <a:t>3/24/2026</a:t>
             </a:fld>
             <a:endParaRPr lang="en-US"/>
           </a:p>
@@ -2500,7 +2500,7 @@
             <a:fld id="{1D8BD707-D9CF-40AE-B4C6-C98DA3205C09}" type="datetimeFigureOut">
               <a:rPr lang="en-US" smtClean="0"/>
               <a:pPr/>
-              <a:t>3/23/2026</a:t>
+              <a:t>3/24/2026</a:t>
             </a:fld>
             <a:endParaRPr lang="en-US"/>
           </a:p>
@@ -2708,7 +2708,7 @@
             <a:fld id="{1D8BD707-D9CF-40AE-B4C6-C98DA3205C09}" type="datetimeFigureOut">
               <a:rPr lang="en-US" smtClean="0"/>
               <a:pPr/>
-              <a:t>3/23/2026</a:t>
+              <a:t>3/24/2026</a:t>
             </a:fld>
             <a:endParaRPr lang="en-US"/>
           </a:p>
@@ -6617,6 +6617,36 @@
           </a:p>
         </p:txBody>
       </p:sp>
+      <p:pic>
+        <p:nvPicPr>
+          <p:cNvPr id="3" name="Picture 2">
+            <a:extLst>
+              <a:ext uri="{FF2B5EF4-FFF2-40B4-BE49-F238E27FC236}">
+                <a16:creationId xmlns:a16="http://schemas.microsoft.com/office/drawing/2014/main" id="{B9917BE2-625C-2722-EB47-5E2443D4DC4C}"/>
+              </a:ext>
+            </a:extLst>
+          </p:cNvPr>
+          <p:cNvPicPr>
+            <a:picLocks noChangeAspect="1"/>
+          </p:cNvPicPr>
+          <p:nvPr/>
+        </p:nvPicPr>
+        <p:blipFill>
+          <a:blip r:embed="rId4"/>
+          <a:stretch>
+            <a:fillRect/>
+          </a:stretch>
+        </p:blipFill>
+        <p:spPr>
+          <a:xfrm>
+            <a:off x="2075572" y="2120003"/>
+            <a:ext cx="15697200" cy="7382905"/>
+          </a:xfrm>
+          <a:prstGeom prst="rect">
+            <a:avLst/>
+          </a:prstGeom>
+        </p:spPr>
+      </p:pic>
     </p:spTree>
     <p:extLst>
       <p:ext uri="{BB962C8B-B14F-4D97-AF65-F5344CB8AC3E}">
@@ -9707,6 +9737,36 @@
           </a:p>
         </p:txBody>
       </p:sp>
+      <p:pic>
+        <p:nvPicPr>
+          <p:cNvPr id="3" name="Picture 2">
+            <a:extLst>
+              <a:ext uri="{FF2B5EF4-FFF2-40B4-BE49-F238E27FC236}">
+                <a16:creationId xmlns:a16="http://schemas.microsoft.com/office/drawing/2014/main" id="{472B393C-0E5B-3E14-EAA9-D64BF6350FF5}"/>
+              </a:ext>
+            </a:extLst>
+          </p:cNvPr>
+          <p:cNvPicPr>
+            <a:picLocks noChangeAspect="1"/>
+          </p:cNvPicPr>
+          <p:nvPr/>
+        </p:nvPicPr>
+        <p:blipFill>
+          <a:blip r:embed="rId4"/>
+          <a:stretch>
+            <a:fillRect/>
+          </a:stretch>
+        </p:blipFill>
+        <p:spPr>
+          <a:xfrm>
+            <a:off x="1870047" y="1638300"/>
+            <a:ext cx="15682365" cy="7772400"/>
+          </a:xfrm>
+          <a:prstGeom prst="rect">
+            <a:avLst/>
+          </a:prstGeom>
+        </p:spPr>
+      </p:pic>
     </p:spTree>
     <p:extLst>
       <p:ext uri="{BB962C8B-B14F-4D97-AF65-F5344CB8AC3E}">
@@ -11275,6 +11335,36 @@
           </a:p>
         </p:txBody>
       </p:sp>
+      <p:pic>
+        <p:nvPicPr>
+          <p:cNvPr id="3" name="Picture 2">
+            <a:extLst>
+              <a:ext uri="{FF2B5EF4-FFF2-40B4-BE49-F238E27FC236}">
+                <a16:creationId xmlns:a16="http://schemas.microsoft.com/office/drawing/2014/main" id="{E4DC3436-83E6-23E9-77AB-5AA1C93EB459}"/>
+              </a:ext>
+            </a:extLst>
+          </p:cNvPr>
+          <p:cNvPicPr>
+            <a:picLocks noChangeAspect="1"/>
+          </p:cNvPicPr>
+          <p:nvPr/>
+        </p:nvPicPr>
+        <p:blipFill>
+          <a:blip r:embed="rId4"/>
+          <a:stretch>
+            <a:fillRect/>
+          </a:stretch>
+        </p:blipFill>
+        <p:spPr>
+          <a:xfrm>
+            <a:off x="1878515" y="1539097"/>
+            <a:ext cx="16009707" cy="7625305"/>
+          </a:xfrm>
+          <a:prstGeom prst="rect">
+            <a:avLst/>
+          </a:prstGeom>
+        </p:spPr>
+      </p:pic>
     </p:spTree>
     <p:extLst>
       <p:ext uri="{BB962C8B-B14F-4D97-AF65-F5344CB8AC3E}">
@@ -11333,7 +11423,7 @@
         </p:nvGrpSpPr>
         <p:grpSpPr>
           <a:xfrm>
-            <a:off x="735588" y="7321525"/>
+            <a:off x="570488" y="7265869"/>
             <a:ext cx="992463" cy="992463"/>
             <a:chOff x="0" y="0"/>
             <a:chExt cx="812800" cy="812800"/>
@@ -11459,7 +11549,7 @@
         </p:nvGrpSpPr>
         <p:grpSpPr>
           <a:xfrm>
-            <a:off x="977741" y="3315742"/>
+            <a:off x="812641" y="3260086"/>
             <a:ext cx="508158" cy="543805"/>
             <a:chOff x="0" y="0"/>
             <a:chExt cx="812800" cy="869819"/>
@@ -11592,7 +11682,7 @@
         </p:nvGrpSpPr>
         <p:grpSpPr>
           <a:xfrm>
-            <a:off x="977741" y="1982349"/>
+            <a:off x="812641" y="1926693"/>
             <a:ext cx="508158" cy="543805"/>
             <a:chOff x="0" y="0"/>
             <a:chExt cx="812800" cy="869819"/>
@@ -11725,7 +11815,7 @@
         </p:nvGrpSpPr>
         <p:grpSpPr>
           <a:xfrm>
-            <a:off x="977741" y="3983373"/>
+            <a:off x="812641" y="3927717"/>
             <a:ext cx="508158" cy="543805"/>
             <a:chOff x="0" y="0"/>
             <a:chExt cx="812800" cy="869819"/>
@@ -11858,7 +11948,7 @@
         </p:nvGrpSpPr>
         <p:grpSpPr>
           <a:xfrm>
-            <a:off x="977741" y="2648112"/>
+            <a:off x="812641" y="2592456"/>
             <a:ext cx="508158" cy="543805"/>
             <a:chOff x="0" y="0"/>
             <a:chExt cx="812800" cy="869819"/>
@@ -11991,7 +12081,7 @@
         </p:nvGrpSpPr>
         <p:grpSpPr>
           <a:xfrm>
-            <a:off x="977741" y="5318634"/>
+            <a:off x="812641" y="5262978"/>
             <a:ext cx="508158" cy="543805"/>
             <a:chOff x="0" y="0"/>
             <a:chExt cx="812800" cy="869819"/>
@@ -12124,7 +12214,7 @@
         </p:nvGrpSpPr>
         <p:grpSpPr>
           <a:xfrm>
-            <a:off x="977741" y="4651003"/>
+            <a:off x="812641" y="4595347"/>
             <a:ext cx="508158" cy="543805"/>
             <a:chOff x="0" y="0"/>
             <a:chExt cx="812800" cy="869819"/>
@@ -12257,7 +12347,7 @@
         </p:nvGrpSpPr>
         <p:grpSpPr>
           <a:xfrm>
-            <a:off x="977741" y="5986264"/>
+            <a:off x="812641" y="5930608"/>
             <a:ext cx="508158" cy="543805"/>
             <a:chOff x="0" y="0"/>
             <a:chExt cx="812800" cy="869819"/>
@@ -12390,7 +12480,7 @@
         </p:nvGrpSpPr>
         <p:grpSpPr>
           <a:xfrm>
-            <a:off x="977741" y="6653894"/>
+            <a:off x="812641" y="6598238"/>
             <a:ext cx="508158" cy="543805"/>
             <a:chOff x="0" y="0"/>
             <a:chExt cx="812800" cy="869819"/>
@@ -12523,7 +12613,7 @@
         </p:nvSpPr>
         <p:spPr>
           <a:xfrm>
-            <a:off x="16313420" y="1028700"/>
+            <a:off x="16148320" y="973044"/>
             <a:ext cx="945880" cy="236470"/>
           </a:xfrm>
           <a:custGeom>
@@ -12581,7 +12671,7 @@
         </p:nvGrpSpPr>
         <p:grpSpPr>
           <a:xfrm>
-            <a:off x="16786360" y="-353712"/>
+            <a:off x="16621260" y="-409368"/>
             <a:ext cx="10994424" cy="10994424"/>
             <a:chOff x="0" y="0"/>
             <a:chExt cx="812800" cy="812800"/>
@@ -12699,7 +12789,7 @@
         </p:nvSpPr>
         <p:spPr>
           <a:xfrm>
-            <a:off x="190500" y="290493"/>
+            <a:off x="25400" y="234837"/>
             <a:ext cx="17907000" cy="830997"/>
           </a:xfrm>
           <a:prstGeom prst="rect">
@@ -12731,6 +12821,182 @@
               <a:latin typeface="Times New Roman" panose="02020603050405020304" pitchFamily="18" charset="0"/>
               <a:cs typeface="Times New Roman" panose="02020603050405020304" pitchFamily="18" charset="0"/>
             </a:endParaRPr>
+          </a:p>
+        </p:txBody>
+      </p:sp>
+      <p:sp>
+        <p:nvSpPr>
+          <p:cNvPr id="4" name="TextBox 3">
+            <a:extLst>
+              <a:ext uri="{FF2B5EF4-FFF2-40B4-BE49-F238E27FC236}">
+                <a16:creationId xmlns:a16="http://schemas.microsoft.com/office/drawing/2014/main" id="{92E5CBEC-B2FB-8A1F-61E0-8D761682811D}"/>
+              </a:ext>
+            </a:extLst>
+          </p:cNvPr>
+          <p:cNvSpPr txBox="1"/>
+          <p:nvPr/>
+        </p:nvSpPr>
+        <p:spPr>
+          <a:xfrm>
+            <a:off x="2120738" y="1992142"/>
+            <a:ext cx="14054666" cy="6478184"/>
+          </a:xfrm>
+          <a:prstGeom prst="rect">
+            <a:avLst/>
+          </a:prstGeom>
+          <a:noFill/>
+        </p:spPr>
+        <p:txBody>
+          <a:bodyPr wrap="square">
+            <a:spAutoFit/>
+          </a:bodyPr>
+          <a:lstStyle/>
+          <a:p>
+            <a:pPr>
+              <a:lnSpc>
+                <a:spcPct val="150000"/>
+              </a:lnSpc>
+            </a:pPr>
+            <a:r>
+              <a:rPr lang="en-IN" sz="2800" b="1" dirty="0">
+                <a:latin typeface="Times New Roman" panose="02020603050405020304" pitchFamily="18" charset="0"/>
+                <a:cs typeface="Times New Roman" panose="02020603050405020304" pitchFamily="18" charset="0"/>
+              </a:rPr>
+              <a:t>Advantages:</a:t>
+            </a:r>
+          </a:p>
+          <a:p>
+            <a:pPr marL="457200" indent="-457200">
+              <a:lnSpc>
+                <a:spcPct val="150000"/>
+              </a:lnSpc>
+              <a:buFont typeface="Wingdings" panose="05000000000000000000" pitchFamily="2" charset="2"/>
+              <a:buChar char="§"/>
+            </a:pPr>
+            <a:r>
+              <a:rPr lang="en-IN" sz="2800" dirty="0">
+                <a:latin typeface="Times New Roman" panose="02020603050405020304" pitchFamily="18" charset="0"/>
+                <a:cs typeface="Times New Roman" panose="02020603050405020304" pitchFamily="18" charset="0"/>
+              </a:rPr>
+              <a:t> Automated system.</a:t>
+            </a:r>
+          </a:p>
+          <a:p>
+            <a:pPr marL="457200" indent="-457200">
+              <a:lnSpc>
+                <a:spcPct val="150000"/>
+              </a:lnSpc>
+              <a:buFont typeface="Wingdings" panose="05000000000000000000" pitchFamily="2" charset="2"/>
+              <a:buChar char="§"/>
+            </a:pPr>
+            <a:r>
+              <a:rPr lang="en-IN" sz="2800" dirty="0">
+                <a:latin typeface="Times New Roman" panose="02020603050405020304" pitchFamily="18" charset="0"/>
+                <a:cs typeface="Times New Roman" panose="02020603050405020304" pitchFamily="18" charset="0"/>
+              </a:rPr>
+              <a:t> User-friendly interface.</a:t>
+            </a:r>
+          </a:p>
+          <a:p>
+            <a:pPr marL="457200" indent="-457200">
+              <a:lnSpc>
+                <a:spcPct val="150000"/>
+              </a:lnSpc>
+              <a:buFont typeface="Wingdings" panose="05000000000000000000" pitchFamily="2" charset="2"/>
+              <a:buChar char="§"/>
+            </a:pPr>
+            <a:r>
+              <a:rPr lang="en-IN" sz="2800" dirty="0">
+                <a:latin typeface="Times New Roman" panose="02020603050405020304" pitchFamily="18" charset="0"/>
+                <a:cs typeface="Times New Roman" panose="02020603050405020304" pitchFamily="18" charset="0"/>
+              </a:rPr>
+              <a:t>Secure authentication.</a:t>
+            </a:r>
+          </a:p>
+          <a:p>
+            <a:pPr marL="457200" indent="-457200">
+              <a:lnSpc>
+                <a:spcPct val="150000"/>
+              </a:lnSpc>
+              <a:buFont typeface="Wingdings" panose="05000000000000000000" pitchFamily="2" charset="2"/>
+              <a:buChar char="§"/>
+            </a:pPr>
+            <a:r>
+              <a:rPr lang="en-IN" sz="2800" dirty="0">
+                <a:latin typeface="Times New Roman" panose="02020603050405020304" pitchFamily="18" charset="0"/>
+                <a:cs typeface="Times New Roman" panose="02020603050405020304" pitchFamily="18" charset="0"/>
+              </a:rPr>
+              <a:t>Real-time event display.</a:t>
+            </a:r>
+          </a:p>
+          <a:p>
+            <a:pPr marL="457200" indent="-457200">
+              <a:lnSpc>
+                <a:spcPct val="150000"/>
+              </a:lnSpc>
+              <a:buFont typeface="Wingdings" panose="05000000000000000000" pitchFamily="2" charset="2"/>
+              <a:buChar char="§"/>
+            </a:pPr>
+            <a:r>
+              <a:rPr lang="en-IN" sz="2800" dirty="0">
+                <a:latin typeface="Times New Roman" panose="02020603050405020304" pitchFamily="18" charset="0"/>
+                <a:cs typeface="Times New Roman" panose="02020603050405020304" pitchFamily="18" charset="0"/>
+              </a:rPr>
+              <a:t>Centralized database.</a:t>
+            </a:r>
+            <a:br>
+              <a:rPr lang="en-IN" sz="2800" dirty="0">
+                <a:latin typeface="Times New Roman" panose="02020603050405020304" pitchFamily="18" charset="0"/>
+                <a:cs typeface="Times New Roman" panose="02020603050405020304" pitchFamily="18" charset="0"/>
+              </a:rPr>
+            </a:br>
+            <a:r>
+              <a:rPr lang="en-IN" sz="2800" b="1" dirty="0">
+                <a:latin typeface="Times New Roman" panose="02020603050405020304" pitchFamily="18" charset="0"/>
+                <a:cs typeface="Times New Roman" panose="02020603050405020304" pitchFamily="18" charset="0"/>
+              </a:rPr>
+              <a:t>Limitations:</a:t>
+            </a:r>
+          </a:p>
+          <a:p>
+            <a:pPr>
+              <a:lnSpc>
+                <a:spcPct val="150000"/>
+              </a:lnSpc>
+            </a:pPr>
+            <a:r>
+              <a:rPr lang="en-IN" sz="2800" dirty="0">
+                <a:latin typeface="Times New Roman" panose="02020603050405020304" pitchFamily="18" charset="0"/>
+                <a:cs typeface="Times New Roman" panose="02020603050405020304" pitchFamily="18" charset="0"/>
+              </a:rPr>
+              <a:t>• No online payment system</a:t>
+            </a:r>
+            <a:br>
+              <a:rPr lang="en-IN" sz="2800" dirty="0">
+                <a:latin typeface="Times New Roman" panose="02020603050405020304" pitchFamily="18" charset="0"/>
+                <a:cs typeface="Times New Roman" panose="02020603050405020304" pitchFamily="18" charset="0"/>
+              </a:rPr>
+            </a:br>
+            <a:r>
+              <a:rPr lang="en-IN" sz="2800" dirty="0">
+                <a:latin typeface="Times New Roman" panose="02020603050405020304" pitchFamily="18" charset="0"/>
+                <a:cs typeface="Times New Roman" panose="02020603050405020304" pitchFamily="18" charset="0"/>
+              </a:rPr>
+              <a:t>• Runs on localhost</a:t>
+            </a:r>
+            <a:br>
+              <a:rPr lang="en-IN" sz="2800" dirty="0">
+                <a:latin typeface="Times New Roman" panose="02020603050405020304" pitchFamily="18" charset="0"/>
+                <a:cs typeface="Times New Roman" panose="02020603050405020304" pitchFamily="18" charset="0"/>
+              </a:rPr>
+            </a:br>
+            <a:r>
+              <a:rPr lang="en-IN" sz="2800" dirty="0">
+                <a:latin typeface="Times New Roman" panose="02020603050405020304" pitchFamily="18" charset="0"/>
+                <a:cs typeface="Times New Roman" panose="02020603050405020304" pitchFamily="18" charset="0"/>
+              </a:rPr>
+              <a:t>• No notification system</a:t>
+            </a:r>
           </a:p>
         </p:txBody>
       </p:sp>
